--- a/tests/Lokad.OoxPdf.Tests/Cases/pptx-ladder-04-typography-inventory-opti-probe.pptx
+++ b/tests/Lokad.OoxPdf.Tests/Cases/pptx-ladder-04-typography-inventory-opti-probe.pptx
@@ -3369,10 +3369,10 @@
             </a:r>
             <a:r>
               <a:rPr sz="3000" kern="1200">
-                <a:latin typeface="Calibri Light"/>
                 <a:highlight>
                   <a:srgbClr val="FFF200"/>
                 </a:highlight>
+                <a:latin typeface="Calibri Light"/>
               </a:rPr>
               <a:t>Optimization</a:t>
             </a:r>
